--- a/public/videos/repositories/solo-spot-map/solo-spot-map-tech-preview.pptx
+++ b/public/videos/repositories/solo-spot-map/solo-spot-map-tech-preview.pptx
@@ -134,7 +134,7 @@
           <p:cNvPr id="2" name="タイトル 1">
             <a:extLst>
               <a:ext uri="{FF2B5EF4-FFF2-40B4-BE49-F238E27FC236}">
-                <a16:creationId xmlns:a16="http://schemas.microsoft.com/office/drawing/2014/main" id="{3458503A-9CD4-840C-BDF6-93E6C2FCB0AE}"/>
+                <a16:creationId xmlns:a16="http://schemas.microsoft.com/office/drawing/2014/main" id="{CD37CC3F-CE51-74AD-FAB4-1832ABDF9548}"/>
               </a:ext>
             </a:extLst>
           </p:cNvPr>
@@ -171,7 +171,7 @@
           <p:cNvPr id="3" name="字幕 2">
             <a:extLst>
               <a:ext uri="{FF2B5EF4-FFF2-40B4-BE49-F238E27FC236}">
-                <a16:creationId xmlns:a16="http://schemas.microsoft.com/office/drawing/2014/main" id="{8A59A4FD-27D6-4AF3-2032-F3DE7522B46D}"/>
+                <a16:creationId xmlns:a16="http://schemas.microsoft.com/office/drawing/2014/main" id="{7ADF5036-556F-1FCF-2F2D-857EA06288D2}"/>
               </a:ext>
             </a:extLst>
           </p:cNvPr>
@@ -241,7 +241,7 @@
           <p:cNvPr id="4" name="日付プレースホルダー 3">
             <a:extLst>
               <a:ext uri="{FF2B5EF4-FFF2-40B4-BE49-F238E27FC236}">
-                <a16:creationId xmlns:a16="http://schemas.microsoft.com/office/drawing/2014/main" id="{0B2C77F1-ED98-0871-D5FD-07C080416252}"/>
+                <a16:creationId xmlns:a16="http://schemas.microsoft.com/office/drawing/2014/main" id="{95ED36AE-4EEA-DB57-3C1A-2E61CF9BB5EC}"/>
               </a:ext>
             </a:extLst>
           </p:cNvPr>
@@ -257,7 +257,7 @@
           <a:bodyPr/>
           <a:lstStyle/>
           <a:p>
-            <a:fld id="{2CDA96F7-6C40-4487-BA19-6DBCCFAC34F3}" type="datetimeFigureOut">
+            <a:fld id="{79AAFF8F-0621-4310-B796-EFDC7DF4F78A}" type="datetimeFigureOut">
               <a:rPr kumimoji="1" lang="ja-JP" altLang="en-US" smtClean="0"/>
               <a:t>2026/7/30</a:t>
             </a:fld>
@@ -270,7 +270,7 @@
           <p:cNvPr id="5" name="フッター プレースホルダー 4">
             <a:extLst>
               <a:ext uri="{FF2B5EF4-FFF2-40B4-BE49-F238E27FC236}">
-                <a16:creationId xmlns:a16="http://schemas.microsoft.com/office/drawing/2014/main" id="{C2322882-EB65-8DA0-099D-0682837BF3F8}"/>
+                <a16:creationId xmlns:a16="http://schemas.microsoft.com/office/drawing/2014/main" id="{B961D2D7-8999-ECFC-2A9B-C2C8E3D8E451}"/>
               </a:ext>
             </a:extLst>
           </p:cNvPr>
@@ -295,7 +295,7 @@
           <p:cNvPr id="6" name="スライド番号プレースホルダー 5">
             <a:extLst>
               <a:ext uri="{FF2B5EF4-FFF2-40B4-BE49-F238E27FC236}">
-                <a16:creationId xmlns:a16="http://schemas.microsoft.com/office/drawing/2014/main" id="{CF740100-9909-51F3-E70B-B37CBAED0303}"/>
+                <a16:creationId xmlns:a16="http://schemas.microsoft.com/office/drawing/2014/main" id="{717BF88A-1B51-6628-7873-885DB5818522}"/>
               </a:ext>
             </a:extLst>
           </p:cNvPr>
@@ -311,7 +311,7 @@
           <a:bodyPr/>
           <a:lstStyle/>
           <a:p>
-            <a:fld id="{653D37BD-A0D6-46B4-9781-9D212AF85F98}" type="slidenum">
+            <a:fld id="{1108D385-FBA1-4A3C-A94E-555F3F5DE19B}" type="slidenum">
               <a:rPr kumimoji="1" lang="ja-JP" altLang="en-US" smtClean="0"/>
               <a:t>‹#›</a:t>
             </a:fld>
@@ -322,7 +322,7 @@
     </p:spTree>
     <p:extLst>
       <p:ext uri="{BB962C8B-B14F-4D97-AF65-F5344CB8AC3E}">
-        <p14:creationId xmlns:p14="http://schemas.microsoft.com/office/powerpoint/2010/main" val="773539614"/>
+        <p14:creationId xmlns:p14="http://schemas.microsoft.com/office/powerpoint/2010/main" val="679861455"/>
       </p:ext>
     </p:extLst>
   </p:cSld>
@@ -354,7 +354,7 @@
           <p:cNvPr id="2" name="タイトル 1">
             <a:extLst>
               <a:ext uri="{FF2B5EF4-FFF2-40B4-BE49-F238E27FC236}">
-                <a16:creationId xmlns:a16="http://schemas.microsoft.com/office/drawing/2014/main" id="{6B0BD383-BE1E-FB7A-EFF5-F5D00D3C90DB}"/>
+                <a16:creationId xmlns:a16="http://schemas.microsoft.com/office/drawing/2014/main" id="{1525B9C5-F37F-7374-800E-B8EAB7636FAF}"/>
               </a:ext>
             </a:extLst>
           </p:cNvPr>
@@ -382,7 +382,7 @@
           <p:cNvPr id="3" name="縦書きテキスト プレースホルダー 2">
             <a:extLst>
               <a:ext uri="{FF2B5EF4-FFF2-40B4-BE49-F238E27FC236}">
-                <a16:creationId xmlns:a16="http://schemas.microsoft.com/office/drawing/2014/main" id="{8ED9F9B1-B3BC-B0F7-7471-CD46FA4D8A41}"/>
+                <a16:creationId xmlns:a16="http://schemas.microsoft.com/office/drawing/2014/main" id="{B0DE7E7C-4D25-1992-ADCC-D15A11002C89}"/>
               </a:ext>
             </a:extLst>
           </p:cNvPr>
@@ -471,7 +471,7 @@
           <p:cNvPr id="4" name="日付プレースホルダー 3">
             <a:extLst>
               <a:ext uri="{FF2B5EF4-FFF2-40B4-BE49-F238E27FC236}">
-                <a16:creationId xmlns:a16="http://schemas.microsoft.com/office/drawing/2014/main" id="{942762CE-CAE5-D79E-2BA3-C55C1D645044}"/>
+                <a16:creationId xmlns:a16="http://schemas.microsoft.com/office/drawing/2014/main" id="{61BF2C67-BE3B-4CF6-485C-C57479513F81}"/>
               </a:ext>
             </a:extLst>
           </p:cNvPr>
@@ -487,7 +487,7 @@
           <a:bodyPr/>
           <a:lstStyle/>
           <a:p>
-            <a:fld id="{2CDA96F7-6C40-4487-BA19-6DBCCFAC34F3}" type="datetimeFigureOut">
+            <a:fld id="{79AAFF8F-0621-4310-B796-EFDC7DF4F78A}" type="datetimeFigureOut">
               <a:rPr kumimoji="1" lang="ja-JP" altLang="en-US" smtClean="0"/>
               <a:t>2026/7/30</a:t>
             </a:fld>
@@ -500,7 +500,7 @@
           <p:cNvPr id="5" name="フッター プレースホルダー 4">
             <a:extLst>
               <a:ext uri="{FF2B5EF4-FFF2-40B4-BE49-F238E27FC236}">
-                <a16:creationId xmlns:a16="http://schemas.microsoft.com/office/drawing/2014/main" id="{F84FDE46-3A79-B300-E160-33D66DD3C223}"/>
+                <a16:creationId xmlns:a16="http://schemas.microsoft.com/office/drawing/2014/main" id="{212D8388-C495-476E-B655-3BFEF943A5B0}"/>
               </a:ext>
             </a:extLst>
           </p:cNvPr>
@@ -525,7 +525,7 @@
           <p:cNvPr id="6" name="スライド番号プレースホルダー 5">
             <a:extLst>
               <a:ext uri="{FF2B5EF4-FFF2-40B4-BE49-F238E27FC236}">
-                <a16:creationId xmlns:a16="http://schemas.microsoft.com/office/drawing/2014/main" id="{ED2F4C52-2DC4-012D-F3BC-8237B544EFA3}"/>
+                <a16:creationId xmlns:a16="http://schemas.microsoft.com/office/drawing/2014/main" id="{26D9BF2F-BC5B-4EFF-1B02-94FE767D86F4}"/>
               </a:ext>
             </a:extLst>
           </p:cNvPr>
@@ -541,7 +541,7 @@
           <a:bodyPr/>
           <a:lstStyle/>
           <a:p>
-            <a:fld id="{653D37BD-A0D6-46B4-9781-9D212AF85F98}" type="slidenum">
+            <a:fld id="{1108D385-FBA1-4A3C-A94E-555F3F5DE19B}" type="slidenum">
               <a:rPr kumimoji="1" lang="ja-JP" altLang="en-US" smtClean="0"/>
               <a:t>‹#›</a:t>
             </a:fld>
@@ -552,7 +552,7 @@
     </p:spTree>
     <p:extLst>
       <p:ext uri="{BB962C8B-B14F-4D97-AF65-F5344CB8AC3E}">
-        <p14:creationId xmlns:p14="http://schemas.microsoft.com/office/powerpoint/2010/main" val="1346313562"/>
+        <p14:creationId xmlns:p14="http://schemas.microsoft.com/office/powerpoint/2010/main" val="2423347257"/>
       </p:ext>
     </p:extLst>
   </p:cSld>
@@ -584,7 +584,7 @@
           <p:cNvPr id="2" name="縦書きタイトル 1">
             <a:extLst>
               <a:ext uri="{FF2B5EF4-FFF2-40B4-BE49-F238E27FC236}">
-                <a16:creationId xmlns:a16="http://schemas.microsoft.com/office/drawing/2014/main" id="{47E994C8-D5AA-BDDE-1741-F04585C64B23}"/>
+                <a16:creationId xmlns:a16="http://schemas.microsoft.com/office/drawing/2014/main" id="{32914D77-7F9F-0E58-EE8F-440D4F0422BC}"/>
               </a:ext>
             </a:extLst>
           </p:cNvPr>
@@ -617,7 +617,7 @@
           <p:cNvPr id="3" name="縦書きテキスト プレースホルダー 2">
             <a:extLst>
               <a:ext uri="{FF2B5EF4-FFF2-40B4-BE49-F238E27FC236}">
-                <a16:creationId xmlns:a16="http://schemas.microsoft.com/office/drawing/2014/main" id="{55242682-8E50-26A1-5DA4-E36461D5AA53}"/>
+                <a16:creationId xmlns:a16="http://schemas.microsoft.com/office/drawing/2014/main" id="{952733CD-2AA1-21D6-D60A-212826D35D7B}"/>
               </a:ext>
             </a:extLst>
           </p:cNvPr>
@@ -711,7 +711,7 @@
           <p:cNvPr id="4" name="日付プレースホルダー 3">
             <a:extLst>
               <a:ext uri="{FF2B5EF4-FFF2-40B4-BE49-F238E27FC236}">
-                <a16:creationId xmlns:a16="http://schemas.microsoft.com/office/drawing/2014/main" id="{702783B7-987F-8468-F038-20502433488B}"/>
+                <a16:creationId xmlns:a16="http://schemas.microsoft.com/office/drawing/2014/main" id="{BC7A27F2-97C4-54EC-1BDA-52DEB77F6279}"/>
               </a:ext>
             </a:extLst>
           </p:cNvPr>
@@ -727,7 +727,7 @@
           <a:bodyPr/>
           <a:lstStyle/>
           <a:p>
-            <a:fld id="{2CDA96F7-6C40-4487-BA19-6DBCCFAC34F3}" type="datetimeFigureOut">
+            <a:fld id="{79AAFF8F-0621-4310-B796-EFDC7DF4F78A}" type="datetimeFigureOut">
               <a:rPr kumimoji="1" lang="ja-JP" altLang="en-US" smtClean="0"/>
               <a:t>2026/7/30</a:t>
             </a:fld>
@@ -740,7 +740,7 @@
           <p:cNvPr id="5" name="フッター プレースホルダー 4">
             <a:extLst>
               <a:ext uri="{FF2B5EF4-FFF2-40B4-BE49-F238E27FC236}">
-                <a16:creationId xmlns:a16="http://schemas.microsoft.com/office/drawing/2014/main" id="{935F4BD6-5E19-B87E-6CFD-AF20C2CD5EF8}"/>
+                <a16:creationId xmlns:a16="http://schemas.microsoft.com/office/drawing/2014/main" id="{09B77B6B-46BC-6F8B-D3B0-3C4D898E23DA}"/>
               </a:ext>
             </a:extLst>
           </p:cNvPr>
@@ -765,7 +765,7 @@
           <p:cNvPr id="6" name="スライド番号プレースホルダー 5">
             <a:extLst>
               <a:ext uri="{FF2B5EF4-FFF2-40B4-BE49-F238E27FC236}">
-                <a16:creationId xmlns:a16="http://schemas.microsoft.com/office/drawing/2014/main" id="{58C678CD-10B1-1FC3-6DC1-CBF127B88A4D}"/>
+                <a16:creationId xmlns:a16="http://schemas.microsoft.com/office/drawing/2014/main" id="{5CD56725-DED8-4E8A-0492-FACC8CD0DA15}"/>
               </a:ext>
             </a:extLst>
           </p:cNvPr>
@@ -781,7 +781,7 @@
           <a:bodyPr/>
           <a:lstStyle/>
           <a:p>
-            <a:fld id="{653D37BD-A0D6-46B4-9781-9D212AF85F98}" type="slidenum">
+            <a:fld id="{1108D385-FBA1-4A3C-A94E-555F3F5DE19B}" type="slidenum">
               <a:rPr kumimoji="1" lang="ja-JP" altLang="en-US" smtClean="0"/>
               <a:t>‹#›</a:t>
             </a:fld>
@@ -792,7 +792,7 @@
     </p:spTree>
     <p:extLst>
       <p:ext uri="{BB962C8B-B14F-4D97-AF65-F5344CB8AC3E}">
-        <p14:creationId xmlns:p14="http://schemas.microsoft.com/office/powerpoint/2010/main" val="1843705759"/>
+        <p14:creationId xmlns:p14="http://schemas.microsoft.com/office/powerpoint/2010/main" val="3670886069"/>
       </p:ext>
     </p:extLst>
   </p:cSld>
@@ -824,7 +824,7 @@
           <p:cNvPr id="2" name="タイトル 1">
             <a:extLst>
               <a:ext uri="{FF2B5EF4-FFF2-40B4-BE49-F238E27FC236}">
-                <a16:creationId xmlns:a16="http://schemas.microsoft.com/office/drawing/2014/main" id="{A14459E9-7E3E-5492-4341-06DB81B83793}"/>
+                <a16:creationId xmlns:a16="http://schemas.microsoft.com/office/drawing/2014/main" id="{068E1C35-746D-55C1-DEBD-3A8588DE050C}"/>
               </a:ext>
             </a:extLst>
           </p:cNvPr>
@@ -852,7 +852,7 @@
           <p:cNvPr id="3" name="コンテンツ プレースホルダー 2">
             <a:extLst>
               <a:ext uri="{FF2B5EF4-FFF2-40B4-BE49-F238E27FC236}">
-                <a16:creationId xmlns:a16="http://schemas.microsoft.com/office/drawing/2014/main" id="{6E88BC93-EDBE-92B7-56A4-1D9F1AF294EC}"/>
+                <a16:creationId xmlns:a16="http://schemas.microsoft.com/office/drawing/2014/main" id="{E000B047-F490-F87A-82C0-8288C765C3B0}"/>
               </a:ext>
             </a:extLst>
           </p:cNvPr>
@@ -941,7 +941,7 @@
           <p:cNvPr id="4" name="日付プレースホルダー 3">
             <a:extLst>
               <a:ext uri="{FF2B5EF4-FFF2-40B4-BE49-F238E27FC236}">
-                <a16:creationId xmlns:a16="http://schemas.microsoft.com/office/drawing/2014/main" id="{508C59B9-71A9-FC0D-96BD-B9FB1828FF04}"/>
+                <a16:creationId xmlns:a16="http://schemas.microsoft.com/office/drawing/2014/main" id="{08D1363A-091E-3ABA-B795-519657F36FFF}"/>
               </a:ext>
             </a:extLst>
           </p:cNvPr>
@@ -957,7 +957,7 @@
           <a:bodyPr/>
           <a:lstStyle/>
           <a:p>
-            <a:fld id="{2CDA96F7-6C40-4487-BA19-6DBCCFAC34F3}" type="datetimeFigureOut">
+            <a:fld id="{79AAFF8F-0621-4310-B796-EFDC7DF4F78A}" type="datetimeFigureOut">
               <a:rPr kumimoji="1" lang="ja-JP" altLang="en-US" smtClean="0"/>
               <a:t>2026/7/30</a:t>
             </a:fld>
@@ -970,7 +970,7 @@
           <p:cNvPr id="5" name="フッター プレースホルダー 4">
             <a:extLst>
               <a:ext uri="{FF2B5EF4-FFF2-40B4-BE49-F238E27FC236}">
-                <a16:creationId xmlns:a16="http://schemas.microsoft.com/office/drawing/2014/main" id="{A231A4BC-B244-8268-9F40-8E358425D0FF}"/>
+                <a16:creationId xmlns:a16="http://schemas.microsoft.com/office/drawing/2014/main" id="{59BAB83A-B993-4F64-05EB-6BBA17C7EB71}"/>
               </a:ext>
             </a:extLst>
           </p:cNvPr>
@@ -995,7 +995,7 @@
           <p:cNvPr id="6" name="スライド番号プレースホルダー 5">
             <a:extLst>
               <a:ext uri="{FF2B5EF4-FFF2-40B4-BE49-F238E27FC236}">
-                <a16:creationId xmlns:a16="http://schemas.microsoft.com/office/drawing/2014/main" id="{C1268C60-2B51-6C17-D503-C79D832536A0}"/>
+                <a16:creationId xmlns:a16="http://schemas.microsoft.com/office/drawing/2014/main" id="{792F0C4F-B278-3940-F8EF-481D0523D6EB}"/>
               </a:ext>
             </a:extLst>
           </p:cNvPr>
@@ -1011,7 +1011,7 @@
           <a:bodyPr/>
           <a:lstStyle/>
           <a:p>
-            <a:fld id="{653D37BD-A0D6-46B4-9781-9D212AF85F98}" type="slidenum">
+            <a:fld id="{1108D385-FBA1-4A3C-A94E-555F3F5DE19B}" type="slidenum">
               <a:rPr kumimoji="1" lang="ja-JP" altLang="en-US" smtClean="0"/>
               <a:t>‹#›</a:t>
             </a:fld>
@@ -1022,7 +1022,7 @@
     </p:spTree>
     <p:extLst>
       <p:ext uri="{BB962C8B-B14F-4D97-AF65-F5344CB8AC3E}">
-        <p14:creationId xmlns:p14="http://schemas.microsoft.com/office/powerpoint/2010/main" val="1663812983"/>
+        <p14:creationId xmlns:p14="http://schemas.microsoft.com/office/powerpoint/2010/main" val="2093434625"/>
       </p:ext>
     </p:extLst>
   </p:cSld>
@@ -1054,7 +1054,7 @@
           <p:cNvPr id="2" name="タイトル 1">
             <a:extLst>
               <a:ext uri="{FF2B5EF4-FFF2-40B4-BE49-F238E27FC236}">
-                <a16:creationId xmlns:a16="http://schemas.microsoft.com/office/drawing/2014/main" id="{32ECE5A1-430F-6F33-0F7E-8EA53406A137}"/>
+                <a16:creationId xmlns:a16="http://schemas.microsoft.com/office/drawing/2014/main" id="{48F5EF4B-8333-299E-2445-F33415E3F0A0}"/>
               </a:ext>
             </a:extLst>
           </p:cNvPr>
@@ -1091,7 +1091,7 @@
           <p:cNvPr id="3" name="テキスト プレースホルダー 2">
             <a:extLst>
               <a:ext uri="{FF2B5EF4-FFF2-40B4-BE49-F238E27FC236}">
-                <a16:creationId xmlns:a16="http://schemas.microsoft.com/office/drawing/2014/main" id="{93042BCA-FC19-FD56-EFEE-DDD39B9E3E0B}"/>
+                <a16:creationId xmlns:a16="http://schemas.microsoft.com/office/drawing/2014/main" id="{C6CD81AD-E0F1-5611-BC3B-7EF22CF9EC29}"/>
               </a:ext>
             </a:extLst>
           </p:cNvPr>
@@ -1216,7 +1216,7 @@
           <p:cNvPr id="4" name="日付プレースホルダー 3">
             <a:extLst>
               <a:ext uri="{FF2B5EF4-FFF2-40B4-BE49-F238E27FC236}">
-                <a16:creationId xmlns:a16="http://schemas.microsoft.com/office/drawing/2014/main" id="{757F10CE-B0DF-A921-BFFE-4DC22C5B153E}"/>
+                <a16:creationId xmlns:a16="http://schemas.microsoft.com/office/drawing/2014/main" id="{78EBD9F8-F783-2AA2-A277-479C1669BA2D}"/>
               </a:ext>
             </a:extLst>
           </p:cNvPr>
@@ -1232,7 +1232,7 @@
           <a:bodyPr/>
           <a:lstStyle/>
           <a:p>
-            <a:fld id="{2CDA96F7-6C40-4487-BA19-6DBCCFAC34F3}" type="datetimeFigureOut">
+            <a:fld id="{79AAFF8F-0621-4310-B796-EFDC7DF4F78A}" type="datetimeFigureOut">
               <a:rPr kumimoji="1" lang="ja-JP" altLang="en-US" smtClean="0"/>
               <a:t>2026/7/30</a:t>
             </a:fld>
@@ -1245,7 +1245,7 @@
           <p:cNvPr id="5" name="フッター プレースホルダー 4">
             <a:extLst>
               <a:ext uri="{FF2B5EF4-FFF2-40B4-BE49-F238E27FC236}">
-                <a16:creationId xmlns:a16="http://schemas.microsoft.com/office/drawing/2014/main" id="{C93D6363-EFAB-EA8D-35B3-ACB6CB84BB45}"/>
+                <a16:creationId xmlns:a16="http://schemas.microsoft.com/office/drawing/2014/main" id="{6A2CA996-6F2C-58C5-8A11-4A4CF8C4C8C7}"/>
               </a:ext>
             </a:extLst>
           </p:cNvPr>
@@ -1270,7 +1270,7 @@
           <p:cNvPr id="6" name="スライド番号プレースホルダー 5">
             <a:extLst>
               <a:ext uri="{FF2B5EF4-FFF2-40B4-BE49-F238E27FC236}">
-                <a16:creationId xmlns:a16="http://schemas.microsoft.com/office/drawing/2014/main" id="{7AA37E12-41A3-BC87-F663-D60DA34BC7C0}"/>
+                <a16:creationId xmlns:a16="http://schemas.microsoft.com/office/drawing/2014/main" id="{CD07DE28-E202-2790-625E-DE7A7276DCC3}"/>
               </a:ext>
             </a:extLst>
           </p:cNvPr>
@@ -1286,7 +1286,7 @@
           <a:bodyPr/>
           <a:lstStyle/>
           <a:p>
-            <a:fld id="{653D37BD-A0D6-46B4-9781-9D212AF85F98}" type="slidenum">
+            <a:fld id="{1108D385-FBA1-4A3C-A94E-555F3F5DE19B}" type="slidenum">
               <a:rPr kumimoji="1" lang="ja-JP" altLang="en-US" smtClean="0"/>
               <a:t>‹#›</a:t>
             </a:fld>
@@ -1297,7 +1297,7 @@
     </p:spTree>
     <p:extLst>
       <p:ext uri="{BB962C8B-B14F-4D97-AF65-F5344CB8AC3E}">
-        <p14:creationId xmlns:p14="http://schemas.microsoft.com/office/powerpoint/2010/main" val="2655237973"/>
+        <p14:creationId xmlns:p14="http://schemas.microsoft.com/office/powerpoint/2010/main" val="3310023170"/>
       </p:ext>
     </p:extLst>
   </p:cSld>
@@ -1329,7 +1329,7 @@
           <p:cNvPr id="2" name="タイトル 1">
             <a:extLst>
               <a:ext uri="{FF2B5EF4-FFF2-40B4-BE49-F238E27FC236}">
-                <a16:creationId xmlns:a16="http://schemas.microsoft.com/office/drawing/2014/main" id="{C19B5F1D-3978-AE19-F52A-2A3D5BCFE9EA}"/>
+                <a16:creationId xmlns:a16="http://schemas.microsoft.com/office/drawing/2014/main" id="{7AB2574A-124D-18E9-4A9D-EB929BC20EE6}"/>
               </a:ext>
             </a:extLst>
           </p:cNvPr>
@@ -1357,7 +1357,7 @@
           <p:cNvPr id="3" name="コンテンツ プレースホルダー 2">
             <a:extLst>
               <a:ext uri="{FF2B5EF4-FFF2-40B4-BE49-F238E27FC236}">
-                <a16:creationId xmlns:a16="http://schemas.microsoft.com/office/drawing/2014/main" id="{DED66FD4-B193-AB0A-F279-0D5226CBE750}"/>
+                <a16:creationId xmlns:a16="http://schemas.microsoft.com/office/drawing/2014/main" id="{9F48A790-A88E-C759-8EE5-4F7B8B7CA551}"/>
               </a:ext>
             </a:extLst>
           </p:cNvPr>
@@ -1451,7 +1451,7 @@
           <p:cNvPr id="4" name="コンテンツ プレースホルダー 3">
             <a:extLst>
               <a:ext uri="{FF2B5EF4-FFF2-40B4-BE49-F238E27FC236}">
-                <a16:creationId xmlns:a16="http://schemas.microsoft.com/office/drawing/2014/main" id="{D69FC7AC-9145-C330-FE5E-5EF768FBD886}"/>
+                <a16:creationId xmlns:a16="http://schemas.microsoft.com/office/drawing/2014/main" id="{E5C35417-C42A-5C3C-E8EB-6D96B897E4C0}"/>
               </a:ext>
             </a:extLst>
           </p:cNvPr>
@@ -1545,7 +1545,7 @@
           <p:cNvPr id="5" name="日付プレースホルダー 4">
             <a:extLst>
               <a:ext uri="{FF2B5EF4-FFF2-40B4-BE49-F238E27FC236}">
-                <a16:creationId xmlns:a16="http://schemas.microsoft.com/office/drawing/2014/main" id="{699ED062-8626-1024-E312-EE9C34D43B49}"/>
+                <a16:creationId xmlns:a16="http://schemas.microsoft.com/office/drawing/2014/main" id="{754BCE69-0346-6F92-7096-57CA9DE27B75}"/>
               </a:ext>
             </a:extLst>
           </p:cNvPr>
@@ -1561,7 +1561,7 @@
           <a:bodyPr/>
           <a:lstStyle/>
           <a:p>
-            <a:fld id="{2CDA96F7-6C40-4487-BA19-6DBCCFAC34F3}" type="datetimeFigureOut">
+            <a:fld id="{79AAFF8F-0621-4310-B796-EFDC7DF4F78A}" type="datetimeFigureOut">
               <a:rPr kumimoji="1" lang="ja-JP" altLang="en-US" smtClean="0"/>
               <a:t>2026/7/30</a:t>
             </a:fld>
@@ -1574,7 +1574,7 @@
           <p:cNvPr id="6" name="フッター プレースホルダー 5">
             <a:extLst>
               <a:ext uri="{FF2B5EF4-FFF2-40B4-BE49-F238E27FC236}">
-                <a16:creationId xmlns:a16="http://schemas.microsoft.com/office/drawing/2014/main" id="{55F50D01-F21D-E23F-0F62-34E43464F104}"/>
+                <a16:creationId xmlns:a16="http://schemas.microsoft.com/office/drawing/2014/main" id="{8753220E-62AE-5D2F-B2A9-B3E5C56F86B1}"/>
               </a:ext>
             </a:extLst>
           </p:cNvPr>
@@ -1599,7 +1599,7 @@
           <p:cNvPr id="7" name="スライド番号プレースホルダー 6">
             <a:extLst>
               <a:ext uri="{FF2B5EF4-FFF2-40B4-BE49-F238E27FC236}">
-                <a16:creationId xmlns:a16="http://schemas.microsoft.com/office/drawing/2014/main" id="{750BC002-0DAE-4C53-349B-0F0929614CD0}"/>
+                <a16:creationId xmlns:a16="http://schemas.microsoft.com/office/drawing/2014/main" id="{18B9C913-CBD9-BC9F-35AC-93526FAFE96F}"/>
               </a:ext>
             </a:extLst>
           </p:cNvPr>
@@ -1615,7 +1615,7 @@
           <a:bodyPr/>
           <a:lstStyle/>
           <a:p>
-            <a:fld id="{653D37BD-A0D6-46B4-9781-9D212AF85F98}" type="slidenum">
+            <a:fld id="{1108D385-FBA1-4A3C-A94E-555F3F5DE19B}" type="slidenum">
               <a:rPr kumimoji="1" lang="ja-JP" altLang="en-US" smtClean="0"/>
               <a:t>‹#›</a:t>
             </a:fld>
@@ -1626,7 +1626,7 @@
     </p:spTree>
     <p:extLst>
       <p:ext uri="{BB962C8B-B14F-4D97-AF65-F5344CB8AC3E}">
-        <p14:creationId xmlns:p14="http://schemas.microsoft.com/office/powerpoint/2010/main" val="59658553"/>
+        <p14:creationId xmlns:p14="http://schemas.microsoft.com/office/powerpoint/2010/main" val="1781076671"/>
       </p:ext>
     </p:extLst>
   </p:cSld>
@@ -1658,7 +1658,7 @@
           <p:cNvPr id="2" name="タイトル 1">
             <a:extLst>
               <a:ext uri="{FF2B5EF4-FFF2-40B4-BE49-F238E27FC236}">
-                <a16:creationId xmlns:a16="http://schemas.microsoft.com/office/drawing/2014/main" id="{64B5F620-0A23-8939-DD70-D749AF010673}"/>
+                <a16:creationId xmlns:a16="http://schemas.microsoft.com/office/drawing/2014/main" id="{FAA13CEF-B266-89A4-544F-BA87ED6EFB07}"/>
               </a:ext>
             </a:extLst>
           </p:cNvPr>
@@ -1691,7 +1691,7 @@
           <p:cNvPr id="3" name="テキスト プレースホルダー 2">
             <a:extLst>
               <a:ext uri="{FF2B5EF4-FFF2-40B4-BE49-F238E27FC236}">
-                <a16:creationId xmlns:a16="http://schemas.microsoft.com/office/drawing/2014/main" id="{F6B98F86-13ED-B7B6-113A-35C40924717A}"/>
+                <a16:creationId xmlns:a16="http://schemas.microsoft.com/office/drawing/2014/main" id="{C5565F25-3283-4597-4606-A2CF65384BDF}"/>
               </a:ext>
             </a:extLst>
           </p:cNvPr>
@@ -1762,7 +1762,7 @@
           <p:cNvPr id="4" name="コンテンツ プレースホルダー 3">
             <a:extLst>
               <a:ext uri="{FF2B5EF4-FFF2-40B4-BE49-F238E27FC236}">
-                <a16:creationId xmlns:a16="http://schemas.microsoft.com/office/drawing/2014/main" id="{21167919-D6C7-7F55-79C7-43474BD5ADF7}"/>
+                <a16:creationId xmlns:a16="http://schemas.microsoft.com/office/drawing/2014/main" id="{3A40B582-8F32-5663-192D-0DF018AEA7D7}"/>
               </a:ext>
             </a:extLst>
           </p:cNvPr>
@@ -1856,7 +1856,7 @@
           <p:cNvPr id="5" name="テキスト プレースホルダー 4">
             <a:extLst>
               <a:ext uri="{FF2B5EF4-FFF2-40B4-BE49-F238E27FC236}">
-                <a16:creationId xmlns:a16="http://schemas.microsoft.com/office/drawing/2014/main" id="{07290036-E4FE-2387-C910-3A5724695D0A}"/>
+                <a16:creationId xmlns:a16="http://schemas.microsoft.com/office/drawing/2014/main" id="{66515C7D-666C-B78C-9D8A-C665B49683C5}"/>
               </a:ext>
             </a:extLst>
           </p:cNvPr>
@@ -1927,7 +1927,7 @@
           <p:cNvPr id="6" name="コンテンツ プレースホルダー 5">
             <a:extLst>
               <a:ext uri="{FF2B5EF4-FFF2-40B4-BE49-F238E27FC236}">
-                <a16:creationId xmlns:a16="http://schemas.microsoft.com/office/drawing/2014/main" id="{F3C62A36-665D-7CBD-F926-D07A0A3FF660}"/>
+                <a16:creationId xmlns:a16="http://schemas.microsoft.com/office/drawing/2014/main" id="{6022F7CE-D818-347F-6459-CE707A5F253C}"/>
               </a:ext>
             </a:extLst>
           </p:cNvPr>
@@ -2021,7 +2021,7 @@
           <p:cNvPr id="7" name="日付プレースホルダー 6">
             <a:extLst>
               <a:ext uri="{FF2B5EF4-FFF2-40B4-BE49-F238E27FC236}">
-                <a16:creationId xmlns:a16="http://schemas.microsoft.com/office/drawing/2014/main" id="{30E327F8-C368-F270-DC32-902E459E0865}"/>
+                <a16:creationId xmlns:a16="http://schemas.microsoft.com/office/drawing/2014/main" id="{EA2DDB1A-D269-F4C3-CA19-4235DEF48677}"/>
               </a:ext>
             </a:extLst>
           </p:cNvPr>
@@ -2037,7 +2037,7 @@
           <a:bodyPr/>
           <a:lstStyle/>
           <a:p>
-            <a:fld id="{2CDA96F7-6C40-4487-BA19-6DBCCFAC34F3}" type="datetimeFigureOut">
+            <a:fld id="{79AAFF8F-0621-4310-B796-EFDC7DF4F78A}" type="datetimeFigureOut">
               <a:rPr kumimoji="1" lang="ja-JP" altLang="en-US" smtClean="0"/>
               <a:t>2026/7/30</a:t>
             </a:fld>
@@ -2050,7 +2050,7 @@
           <p:cNvPr id="8" name="フッター プレースホルダー 7">
             <a:extLst>
               <a:ext uri="{FF2B5EF4-FFF2-40B4-BE49-F238E27FC236}">
-                <a16:creationId xmlns:a16="http://schemas.microsoft.com/office/drawing/2014/main" id="{0362E074-74ED-768C-5533-FBA04A907915}"/>
+                <a16:creationId xmlns:a16="http://schemas.microsoft.com/office/drawing/2014/main" id="{47CC387C-A6AF-9C5D-33DD-3D58455BAB5F}"/>
               </a:ext>
             </a:extLst>
           </p:cNvPr>
@@ -2075,7 +2075,7 @@
           <p:cNvPr id="9" name="スライド番号プレースホルダー 8">
             <a:extLst>
               <a:ext uri="{FF2B5EF4-FFF2-40B4-BE49-F238E27FC236}">
-                <a16:creationId xmlns:a16="http://schemas.microsoft.com/office/drawing/2014/main" id="{410FB968-A4DC-3D9E-205D-BD07A2E05596}"/>
+                <a16:creationId xmlns:a16="http://schemas.microsoft.com/office/drawing/2014/main" id="{694733A5-F7CF-41DC-213C-1880775A24A6}"/>
               </a:ext>
             </a:extLst>
           </p:cNvPr>
@@ -2091,7 +2091,7 @@
           <a:bodyPr/>
           <a:lstStyle/>
           <a:p>
-            <a:fld id="{653D37BD-A0D6-46B4-9781-9D212AF85F98}" type="slidenum">
+            <a:fld id="{1108D385-FBA1-4A3C-A94E-555F3F5DE19B}" type="slidenum">
               <a:rPr kumimoji="1" lang="ja-JP" altLang="en-US" smtClean="0"/>
               <a:t>‹#›</a:t>
             </a:fld>
@@ -2102,7 +2102,7 @@
     </p:spTree>
     <p:extLst>
       <p:ext uri="{BB962C8B-B14F-4D97-AF65-F5344CB8AC3E}">
-        <p14:creationId xmlns:p14="http://schemas.microsoft.com/office/powerpoint/2010/main" val="2538556809"/>
+        <p14:creationId xmlns:p14="http://schemas.microsoft.com/office/powerpoint/2010/main" val="1468729119"/>
       </p:ext>
     </p:extLst>
   </p:cSld>
@@ -2134,7 +2134,7 @@
           <p:cNvPr id="2" name="タイトル 1">
             <a:extLst>
               <a:ext uri="{FF2B5EF4-FFF2-40B4-BE49-F238E27FC236}">
-                <a16:creationId xmlns:a16="http://schemas.microsoft.com/office/drawing/2014/main" id="{B15D09A6-138F-2FE8-F169-464B02CAD66F}"/>
+                <a16:creationId xmlns:a16="http://schemas.microsoft.com/office/drawing/2014/main" id="{5438799B-7AEB-CAAB-88CB-AF7CC6387765}"/>
               </a:ext>
             </a:extLst>
           </p:cNvPr>
@@ -2162,7 +2162,7 @@
           <p:cNvPr id="3" name="日付プレースホルダー 2">
             <a:extLst>
               <a:ext uri="{FF2B5EF4-FFF2-40B4-BE49-F238E27FC236}">
-                <a16:creationId xmlns:a16="http://schemas.microsoft.com/office/drawing/2014/main" id="{831F5065-4AD1-E8D9-D4A0-1793C5A38DCB}"/>
+                <a16:creationId xmlns:a16="http://schemas.microsoft.com/office/drawing/2014/main" id="{26ED5A13-845C-762B-EF96-409D35041B19}"/>
               </a:ext>
             </a:extLst>
           </p:cNvPr>
@@ -2178,7 +2178,7 @@
           <a:bodyPr/>
           <a:lstStyle/>
           <a:p>
-            <a:fld id="{2CDA96F7-6C40-4487-BA19-6DBCCFAC34F3}" type="datetimeFigureOut">
+            <a:fld id="{79AAFF8F-0621-4310-B796-EFDC7DF4F78A}" type="datetimeFigureOut">
               <a:rPr kumimoji="1" lang="ja-JP" altLang="en-US" smtClean="0"/>
               <a:t>2026/7/30</a:t>
             </a:fld>
@@ -2191,7 +2191,7 @@
           <p:cNvPr id="4" name="フッター プレースホルダー 3">
             <a:extLst>
               <a:ext uri="{FF2B5EF4-FFF2-40B4-BE49-F238E27FC236}">
-                <a16:creationId xmlns:a16="http://schemas.microsoft.com/office/drawing/2014/main" id="{2898FEDC-E254-373F-EFD7-0276D0424D04}"/>
+                <a16:creationId xmlns:a16="http://schemas.microsoft.com/office/drawing/2014/main" id="{82FDC260-E3FC-01EF-2B64-A92D258316DD}"/>
               </a:ext>
             </a:extLst>
           </p:cNvPr>
@@ -2216,7 +2216,7 @@
           <p:cNvPr id="5" name="スライド番号プレースホルダー 4">
             <a:extLst>
               <a:ext uri="{FF2B5EF4-FFF2-40B4-BE49-F238E27FC236}">
-                <a16:creationId xmlns:a16="http://schemas.microsoft.com/office/drawing/2014/main" id="{5D8DC486-1D10-30F3-7021-963D7B3BEB1F}"/>
+                <a16:creationId xmlns:a16="http://schemas.microsoft.com/office/drawing/2014/main" id="{B9DA7DE6-5ED0-858F-4A40-963E91C6A9AE}"/>
               </a:ext>
             </a:extLst>
           </p:cNvPr>
@@ -2232,7 +2232,7 @@
           <a:bodyPr/>
           <a:lstStyle/>
           <a:p>
-            <a:fld id="{653D37BD-A0D6-46B4-9781-9D212AF85F98}" type="slidenum">
+            <a:fld id="{1108D385-FBA1-4A3C-A94E-555F3F5DE19B}" type="slidenum">
               <a:rPr kumimoji="1" lang="ja-JP" altLang="en-US" smtClean="0"/>
               <a:t>‹#›</a:t>
             </a:fld>
@@ -2243,7 +2243,7 @@
     </p:spTree>
     <p:extLst>
       <p:ext uri="{BB962C8B-B14F-4D97-AF65-F5344CB8AC3E}">
-        <p14:creationId xmlns:p14="http://schemas.microsoft.com/office/powerpoint/2010/main" val="4095623654"/>
+        <p14:creationId xmlns:p14="http://schemas.microsoft.com/office/powerpoint/2010/main" val="589966749"/>
       </p:ext>
     </p:extLst>
   </p:cSld>
@@ -2275,7 +2275,7 @@
           <p:cNvPr id="2" name="日付プレースホルダー 1">
             <a:extLst>
               <a:ext uri="{FF2B5EF4-FFF2-40B4-BE49-F238E27FC236}">
-                <a16:creationId xmlns:a16="http://schemas.microsoft.com/office/drawing/2014/main" id="{DFEB46F9-F8B3-5EF9-3855-13003A1A8C86}"/>
+                <a16:creationId xmlns:a16="http://schemas.microsoft.com/office/drawing/2014/main" id="{72DA2570-C85F-1A42-4F84-775562B1CB6E}"/>
               </a:ext>
             </a:extLst>
           </p:cNvPr>
@@ -2291,7 +2291,7 @@
           <a:bodyPr/>
           <a:lstStyle/>
           <a:p>
-            <a:fld id="{2CDA96F7-6C40-4487-BA19-6DBCCFAC34F3}" type="datetimeFigureOut">
+            <a:fld id="{79AAFF8F-0621-4310-B796-EFDC7DF4F78A}" type="datetimeFigureOut">
               <a:rPr kumimoji="1" lang="ja-JP" altLang="en-US" smtClean="0"/>
               <a:t>2026/7/30</a:t>
             </a:fld>
@@ -2304,7 +2304,7 @@
           <p:cNvPr id="3" name="フッター プレースホルダー 2">
             <a:extLst>
               <a:ext uri="{FF2B5EF4-FFF2-40B4-BE49-F238E27FC236}">
-                <a16:creationId xmlns:a16="http://schemas.microsoft.com/office/drawing/2014/main" id="{B46D79B7-1B39-75F6-9804-D0486BE87157}"/>
+                <a16:creationId xmlns:a16="http://schemas.microsoft.com/office/drawing/2014/main" id="{D57DC04C-FA84-E7A2-9434-5802AD1B301C}"/>
               </a:ext>
             </a:extLst>
           </p:cNvPr>
@@ -2329,7 +2329,7 @@
           <p:cNvPr id="4" name="スライド番号プレースホルダー 3">
             <a:extLst>
               <a:ext uri="{FF2B5EF4-FFF2-40B4-BE49-F238E27FC236}">
-                <a16:creationId xmlns:a16="http://schemas.microsoft.com/office/drawing/2014/main" id="{5B6D6F5B-33CD-C6F2-3677-712734DFC3BC}"/>
+                <a16:creationId xmlns:a16="http://schemas.microsoft.com/office/drawing/2014/main" id="{41DE44B6-9FA5-EE8C-1723-56CA93FFF14E}"/>
               </a:ext>
             </a:extLst>
           </p:cNvPr>
@@ -2345,7 +2345,7 @@
           <a:bodyPr/>
           <a:lstStyle/>
           <a:p>
-            <a:fld id="{653D37BD-A0D6-46B4-9781-9D212AF85F98}" type="slidenum">
+            <a:fld id="{1108D385-FBA1-4A3C-A94E-555F3F5DE19B}" type="slidenum">
               <a:rPr kumimoji="1" lang="ja-JP" altLang="en-US" smtClean="0"/>
               <a:t>‹#›</a:t>
             </a:fld>
@@ -2356,7 +2356,7 @@
     </p:spTree>
     <p:extLst>
       <p:ext uri="{BB962C8B-B14F-4D97-AF65-F5344CB8AC3E}">
-        <p14:creationId xmlns:p14="http://schemas.microsoft.com/office/powerpoint/2010/main" val="3366585610"/>
+        <p14:creationId xmlns:p14="http://schemas.microsoft.com/office/powerpoint/2010/main" val="2712633045"/>
       </p:ext>
     </p:extLst>
   </p:cSld>
@@ -2388,7 +2388,7 @@
           <p:cNvPr id="2" name="タイトル 1">
             <a:extLst>
               <a:ext uri="{FF2B5EF4-FFF2-40B4-BE49-F238E27FC236}">
-                <a16:creationId xmlns:a16="http://schemas.microsoft.com/office/drawing/2014/main" id="{EB874AC4-D024-C95D-BEB6-ED08A245C1C5}"/>
+                <a16:creationId xmlns:a16="http://schemas.microsoft.com/office/drawing/2014/main" id="{9FDB417B-05C4-D26F-2409-360B31F20F23}"/>
               </a:ext>
             </a:extLst>
           </p:cNvPr>
@@ -2425,7 +2425,7 @@
           <p:cNvPr id="3" name="コンテンツ プレースホルダー 2">
             <a:extLst>
               <a:ext uri="{FF2B5EF4-FFF2-40B4-BE49-F238E27FC236}">
-                <a16:creationId xmlns:a16="http://schemas.microsoft.com/office/drawing/2014/main" id="{5FFE298C-259C-8929-69D5-D2E43585C25A}"/>
+                <a16:creationId xmlns:a16="http://schemas.microsoft.com/office/drawing/2014/main" id="{F2CAECD6-D1A6-BD30-0C91-28792F3706EF}"/>
               </a:ext>
             </a:extLst>
           </p:cNvPr>
@@ -2547,7 +2547,7 @@
           <p:cNvPr id="4" name="テキスト プレースホルダー 3">
             <a:extLst>
               <a:ext uri="{FF2B5EF4-FFF2-40B4-BE49-F238E27FC236}">
-                <a16:creationId xmlns:a16="http://schemas.microsoft.com/office/drawing/2014/main" id="{66B103F8-4F52-836A-6159-746DD473EAD1}"/>
+                <a16:creationId xmlns:a16="http://schemas.microsoft.com/office/drawing/2014/main" id="{3932A2E5-5964-352E-0F91-80C445C92C61}"/>
               </a:ext>
             </a:extLst>
           </p:cNvPr>
@@ -2618,7 +2618,7 @@
           <p:cNvPr id="5" name="日付プレースホルダー 4">
             <a:extLst>
               <a:ext uri="{FF2B5EF4-FFF2-40B4-BE49-F238E27FC236}">
-                <a16:creationId xmlns:a16="http://schemas.microsoft.com/office/drawing/2014/main" id="{56DAC1B9-86A7-EA51-A599-14AD1299E018}"/>
+                <a16:creationId xmlns:a16="http://schemas.microsoft.com/office/drawing/2014/main" id="{0F5DC76B-4EE8-8ADA-7CBC-416E02755A63}"/>
               </a:ext>
             </a:extLst>
           </p:cNvPr>
@@ -2634,7 +2634,7 @@
           <a:bodyPr/>
           <a:lstStyle/>
           <a:p>
-            <a:fld id="{2CDA96F7-6C40-4487-BA19-6DBCCFAC34F3}" type="datetimeFigureOut">
+            <a:fld id="{79AAFF8F-0621-4310-B796-EFDC7DF4F78A}" type="datetimeFigureOut">
               <a:rPr kumimoji="1" lang="ja-JP" altLang="en-US" smtClean="0"/>
               <a:t>2026/7/30</a:t>
             </a:fld>
@@ -2647,7 +2647,7 @@
           <p:cNvPr id="6" name="フッター プレースホルダー 5">
             <a:extLst>
               <a:ext uri="{FF2B5EF4-FFF2-40B4-BE49-F238E27FC236}">
-                <a16:creationId xmlns:a16="http://schemas.microsoft.com/office/drawing/2014/main" id="{C06C9393-091F-2467-13FB-D42E6B73BAFD}"/>
+                <a16:creationId xmlns:a16="http://schemas.microsoft.com/office/drawing/2014/main" id="{6CFBE7F9-BFC8-8D1E-49B8-1277D8BDC385}"/>
               </a:ext>
             </a:extLst>
           </p:cNvPr>
@@ -2672,7 +2672,7 @@
           <p:cNvPr id="7" name="スライド番号プレースホルダー 6">
             <a:extLst>
               <a:ext uri="{FF2B5EF4-FFF2-40B4-BE49-F238E27FC236}">
-                <a16:creationId xmlns:a16="http://schemas.microsoft.com/office/drawing/2014/main" id="{85B383E9-8772-108D-1B66-73179DABF09E}"/>
+                <a16:creationId xmlns:a16="http://schemas.microsoft.com/office/drawing/2014/main" id="{2BCC985F-8E6C-39EF-77AB-E6BDD0CECB3C}"/>
               </a:ext>
             </a:extLst>
           </p:cNvPr>
@@ -2688,7 +2688,7 @@
           <a:bodyPr/>
           <a:lstStyle/>
           <a:p>
-            <a:fld id="{653D37BD-A0D6-46B4-9781-9D212AF85F98}" type="slidenum">
+            <a:fld id="{1108D385-FBA1-4A3C-A94E-555F3F5DE19B}" type="slidenum">
               <a:rPr kumimoji="1" lang="ja-JP" altLang="en-US" smtClean="0"/>
               <a:t>‹#›</a:t>
             </a:fld>
@@ -2699,7 +2699,7 @@
     </p:spTree>
     <p:extLst>
       <p:ext uri="{BB962C8B-B14F-4D97-AF65-F5344CB8AC3E}">
-        <p14:creationId xmlns:p14="http://schemas.microsoft.com/office/powerpoint/2010/main" val="1309858608"/>
+        <p14:creationId xmlns:p14="http://schemas.microsoft.com/office/powerpoint/2010/main" val="3426093351"/>
       </p:ext>
     </p:extLst>
   </p:cSld>
@@ -2731,7 +2731,7 @@
           <p:cNvPr id="2" name="タイトル 1">
             <a:extLst>
               <a:ext uri="{FF2B5EF4-FFF2-40B4-BE49-F238E27FC236}">
-                <a16:creationId xmlns:a16="http://schemas.microsoft.com/office/drawing/2014/main" id="{9DBF5F57-F5E4-9943-7CE1-0A1C0C259A15}"/>
+                <a16:creationId xmlns:a16="http://schemas.microsoft.com/office/drawing/2014/main" id="{28504988-CFDB-17B8-04B1-C055F5F41ECB}"/>
               </a:ext>
             </a:extLst>
           </p:cNvPr>
@@ -2768,7 +2768,7 @@
           <p:cNvPr id="3" name="図プレースホルダー 2">
             <a:extLst>
               <a:ext uri="{FF2B5EF4-FFF2-40B4-BE49-F238E27FC236}">
-                <a16:creationId xmlns:a16="http://schemas.microsoft.com/office/drawing/2014/main" id="{7FC6F77C-CB55-4E2B-E135-69C4EC0165AA}"/>
+                <a16:creationId xmlns:a16="http://schemas.microsoft.com/office/drawing/2014/main" id="{3CA25F12-9061-8ED1-3A0A-6697FA4D92A1}"/>
               </a:ext>
             </a:extLst>
           </p:cNvPr>
@@ -2835,7 +2835,7 @@
           <p:cNvPr id="4" name="テキスト プレースホルダー 3">
             <a:extLst>
               <a:ext uri="{FF2B5EF4-FFF2-40B4-BE49-F238E27FC236}">
-                <a16:creationId xmlns:a16="http://schemas.microsoft.com/office/drawing/2014/main" id="{0A97302D-7AFD-C9C8-F782-55BD532AF76C}"/>
+                <a16:creationId xmlns:a16="http://schemas.microsoft.com/office/drawing/2014/main" id="{05111757-3CD5-4C59-1B5E-06A80E8BF6B7}"/>
               </a:ext>
             </a:extLst>
           </p:cNvPr>
@@ -2906,7 +2906,7 @@
           <p:cNvPr id="5" name="日付プレースホルダー 4">
             <a:extLst>
               <a:ext uri="{FF2B5EF4-FFF2-40B4-BE49-F238E27FC236}">
-                <a16:creationId xmlns:a16="http://schemas.microsoft.com/office/drawing/2014/main" id="{DBF98CF1-CBC5-1C1F-84CD-6EE9B6ED5563}"/>
+                <a16:creationId xmlns:a16="http://schemas.microsoft.com/office/drawing/2014/main" id="{C1F4E969-8D13-CFB2-C8DD-B3CDD7653FE3}"/>
               </a:ext>
             </a:extLst>
           </p:cNvPr>
@@ -2922,7 +2922,7 @@
           <a:bodyPr/>
           <a:lstStyle/>
           <a:p>
-            <a:fld id="{2CDA96F7-6C40-4487-BA19-6DBCCFAC34F3}" type="datetimeFigureOut">
+            <a:fld id="{79AAFF8F-0621-4310-B796-EFDC7DF4F78A}" type="datetimeFigureOut">
               <a:rPr kumimoji="1" lang="ja-JP" altLang="en-US" smtClean="0"/>
               <a:t>2026/7/30</a:t>
             </a:fld>
@@ -2935,7 +2935,7 @@
           <p:cNvPr id="6" name="フッター プレースホルダー 5">
             <a:extLst>
               <a:ext uri="{FF2B5EF4-FFF2-40B4-BE49-F238E27FC236}">
-                <a16:creationId xmlns:a16="http://schemas.microsoft.com/office/drawing/2014/main" id="{B6CB0377-FBB1-9C6B-FE01-B65F617C8AF8}"/>
+                <a16:creationId xmlns:a16="http://schemas.microsoft.com/office/drawing/2014/main" id="{456443C0-DA87-F02F-D19D-4DBEB176692B}"/>
               </a:ext>
             </a:extLst>
           </p:cNvPr>
@@ -2960,7 +2960,7 @@
           <p:cNvPr id="7" name="スライド番号プレースホルダー 6">
             <a:extLst>
               <a:ext uri="{FF2B5EF4-FFF2-40B4-BE49-F238E27FC236}">
-                <a16:creationId xmlns:a16="http://schemas.microsoft.com/office/drawing/2014/main" id="{58387927-3A95-4CB6-530A-CB188E5A5F9D}"/>
+                <a16:creationId xmlns:a16="http://schemas.microsoft.com/office/drawing/2014/main" id="{48DE633C-069C-8ABF-EB3A-C118D30C5E64}"/>
               </a:ext>
             </a:extLst>
           </p:cNvPr>
@@ -2976,7 +2976,7 @@
           <a:bodyPr/>
           <a:lstStyle/>
           <a:p>
-            <a:fld id="{653D37BD-A0D6-46B4-9781-9D212AF85F98}" type="slidenum">
+            <a:fld id="{1108D385-FBA1-4A3C-A94E-555F3F5DE19B}" type="slidenum">
               <a:rPr kumimoji="1" lang="ja-JP" altLang="en-US" smtClean="0"/>
               <a:t>‹#›</a:t>
             </a:fld>
@@ -2987,7 +2987,7 @@
     </p:spTree>
     <p:extLst>
       <p:ext uri="{BB962C8B-B14F-4D97-AF65-F5344CB8AC3E}">
-        <p14:creationId xmlns:p14="http://schemas.microsoft.com/office/powerpoint/2010/main" val="1510942147"/>
+        <p14:creationId xmlns:p14="http://schemas.microsoft.com/office/powerpoint/2010/main" val="916455454"/>
       </p:ext>
     </p:extLst>
   </p:cSld>
@@ -3024,7 +3024,7 @@
           <p:cNvPr id="2" name="タイトル プレースホルダー 1">
             <a:extLst>
               <a:ext uri="{FF2B5EF4-FFF2-40B4-BE49-F238E27FC236}">
-                <a16:creationId xmlns:a16="http://schemas.microsoft.com/office/drawing/2014/main" id="{19AE3EE0-97E5-8BD6-542B-3B045EADC674}"/>
+                <a16:creationId xmlns:a16="http://schemas.microsoft.com/office/drawing/2014/main" id="{8B3019E2-4F11-2865-6ACC-9BB03CABAB03}"/>
               </a:ext>
             </a:extLst>
           </p:cNvPr>
@@ -3062,7 +3062,7 @@
           <p:cNvPr id="3" name="テキスト プレースホルダー 2">
             <a:extLst>
               <a:ext uri="{FF2B5EF4-FFF2-40B4-BE49-F238E27FC236}">
-                <a16:creationId xmlns:a16="http://schemas.microsoft.com/office/drawing/2014/main" id="{D2F96CDC-EF35-72A4-2156-22C95FADAB4C}"/>
+                <a16:creationId xmlns:a16="http://schemas.microsoft.com/office/drawing/2014/main" id="{05E86241-E844-E3F5-5D91-B4521B32989E}"/>
               </a:ext>
             </a:extLst>
           </p:cNvPr>
@@ -3161,7 +3161,7 @@
           <p:cNvPr id="4" name="日付プレースホルダー 3">
             <a:extLst>
               <a:ext uri="{FF2B5EF4-FFF2-40B4-BE49-F238E27FC236}">
-                <a16:creationId xmlns:a16="http://schemas.microsoft.com/office/drawing/2014/main" id="{74AE2AAE-7595-C68B-24AC-42A127B47F08}"/>
+                <a16:creationId xmlns:a16="http://schemas.microsoft.com/office/drawing/2014/main" id="{264AC329-3036-FF3C-B615-C57531DC8882}"/>
               </a:ext>
             </a:extLst>
           </p:cNvPr>
@@ -3195,7 +3195,7 @@
             </a:lvl1pPr>
           </a:lstStyle>
           <a:p>
-            <a:fld id="{2CDA96F7-6C40-4487-BA19-6DBCCFAC34F3}" type="datetimeFigureOut">
+            <a:fld id="{79AAFF8F-0621-4310-B796-EFDC7DF4F78A}" type="datetimeFigureOut">
               <a:rPr kumimoji="1" lang="ja-JP" altLang="en-US" smtClean="0"/>
               <a:t>2026/7/30</a:t>
             </a:fld>
@@ -3208,7 +3208,7 @@
           <p:cNvPr id="5" name="フッター プレースホルダー 4">
             <a:extLst>
               <a:ext uri="{FF2B5EF4-FFF2-40B4-BE49-F238E27FC236}">
-                <a16:creationId xmlns:a16="http://schemas.microsoft.com/office/drawing/2014/main" id="{C265C7FC-3A1E-C9EE-7C88-EAF64368EC03}"/>
+                <a16:creationId xmlns:a16="http://schemas.microsoft.com/office/drawing/2014/main" id="{E1B50E91-4111-CBD4-8796-8796A37CFC5F}"/>
               </a:ext>
             </a:extLst>
           </p:cNvPr>
@@ -3251,7 +3251,7 @@
           <p:cNvPr id="6" name="スライド番号プレースホルダー 5">
             <a:extLst>
               <a:ext uri="{FF2B5EF4-FFF2-40B4-BE49-F238E27FC236}">
-                <a16:creationId xmlns:a16="http://schemas.microsoft.com/office/drawing/2014/main" id="{6D20ED89-31CE-58A7-26AF-D096FFC669A1}"/>
+                <a16:creationId xmlns:a16="http://schemas.microsoft.com/office/drawing/2014/main" id="{D93231D1-AE9D-8180-889D-FCDB81B8C1CA}"/>
               </a:ext>
             </a:extLst>
           </p:cNvPr>
@@ -3285,7 +3285,7 @@
             </a:lvl1pPr>
           </a:lstStyle>
           <a:p>
-            <a:fld id="{653D37BD-A0D6-46B4-9781-9D212AF85F98}" type="slidenum">
+            <a:fld id="{1108D385-FBA1-4A3C-A94E-555F3F5DE19B}" type="slidenum">
               <a:rPr kumimoji="1" lang="ja-JP" altLang="en-US" smtClean="0"/>
               <a:t>‹#›</a:t>
             </a:fld>
@@ -3296,7 +3296,7 @@
     </p:spTree>
     <p:extLst>
       <p:ext uri="{BB962C8B-B14F-4D97-AF65-F5344CB8AC3E}">
-        <p14:creationId xmlns:p14="http://schemas.microsoft.com/office/powerpoint/2010/main" val="1990982031"/>
+        <p14:creationId xmlns:p14="http://schemas.microsoft.com/office/powerpoint/2010/main" val="1166959487"/>
       </p:ext>
     </p:extLst>
   </p:cSld>
@@ -3619,7 +3619,7 @@
           <p:cNvPr id="2" name="テキスト ボックス 1">
             <a:extLst>
               <a:ext uri="{FF2B5EF4-FFF2-40B4-BE49-F238E27FC236}">
-                <a16:creationId xmlns:a16="http://schemas.microsoft.com/office/drawing/2014/main" id="{8F8E2912-E0F3-5FEE-11C5-60D4D46DB5F9}"/>
+                <a16:creationId xmlns:a16="http://schemas.microsoft.com/office/drawing/2014/main" id="{A260BBEE-A03B-6597-8890-9C6806AD0369}"/>
               </a:ext>
             </a:extLst>
           </p:cNvPr>
@@ -3665,7 +3665,7 @@
           <p:cNvPr id="3" name="テキスト ボックス 2">
             <a:extLst>
               <a:ext uri="{FF2B5EF4-FFF2-40B4-BE49-F238E27FC236}">
-                <a16:creationId xmlns:a16="http://schemas.microsoft.com/office/drawing/2014/main" id="{BB67D3F3-5D45-7FCD-12C5-5975AF73CB69}"/>
+                <a16:creationId xmlns:a16="http://schemas.microsoft.com/office/drawing/2014/main" id="{0F44324C-58FF-C79E-1580-6851DEB6F7BA}"/>
               </a:ext>
             </a:extLst>
           </p:cNvPr>
@@ -3714,7 +3714,7 @@
           <p:cNvPr id="4" name="テキスト ボックス 3">
             <a:extLst>
               <a:ext uri="{FF2B5EF4-FFF2-40B4-BE49-F238E27FC236}">
-                <a16:creationId xmlns:a16="http://schemas.microsoft.com/office/drawing/2014/main" id="{759B870B-5053-2BD7-DD65-160668F9359A}"/>
+                <a16:creationId xmlns:a16="http://schemas.microsoft.com/office/drawing/2014/main" id="{E37D5CD0-3047-06A2-1032-DF8FAA56FB5E}"/>
               </a:ext>
             </a:extLst>
           </p:cNvPr>
@@ -3754,7 +3754,7 @@
           <p:cNvPr id="5" name="テキスト ボックス 4">
             <a:extLst>
               <a:ext uri="{FF2B5EF4-FFF2-40B4-BE49-F238E27FC236}">
-                <a16:creationId xmlns:a16="http://schemas.microsoft.com/office/drawing/2014/main" id="{F1C66A12-0119-2D2C-F392-AD005D2D370F}"/>
+                <a16:creationId xmlns:a16="http://schemas.microsoft.com/office/drawing/2014/main" id="{C36FD6B2-78E5-B1A9-2B76-AC302671AED8}"/>
               </a:ext>
             </a:extLst>
           </p:cNvPr>
@@ -3801,7 +3801,7 @@
             <a:hlinkClick r:id="" action="ppaction://media"/>
             <a:extLst>
               <a:ext uri="{FF2B5EF4-FFF2-40B4-BE49-F238E27FC236}">
-                <a16:creationId xmlns:a16="http://schemas.microsoft.com/office/drawing/2014/main" id="{55311225-8502-74DD-F7A9-5E7EAC555B31}"/>
+                <a16:creationId xmlns:a16="http://schemas.microsoft.com/office/drawing/2014/main" id="{09F34C9B-1BCE-7427-CCFA-938042D7E319}"/>
               </a:ext>
             </a:extLst>
           </p:cNvPr>
@@ -3836,7 +3836,7 @@
     </p:spTree>
     <p:extLst>
       <p:ext uri="{BB962C8B-B14F-4D97-AF65-F5344CB8AC3E}">
-        <p14:creationId xmlns:p14="http://schemas.microsoft.com/office/powerpoint/2010/main" val="2929188596"/>
+        <p14:creationId xmlns:p14="http://schemas.microsoft.com/office/powerpoint/2010/main" val="1171591841"/>
       </p:ext>
     </p:extLst>
   </p:cSld>
@@ -3960,7 +3960,7 @@
           <p:cNvPr id="2" name="テキスト ボックス 1">
             <a:extLst>
               <a:ext uri="{FF2B5EF4-FFF2-40B4-BE49-F238E27FC236}">
-                <a16:creationId xmlns:a16="http://schemas.microsoft.com/office/drawing/2014/main" id="{9E644A01-9C78-3907-5360-8FC324C66B23}"/>
+                <a16:creationId xmlns:a16="http://schemas.microsoft.com/office/drawing/2014/main" id="{419458D0-17F7-FE53-29E5-CEEEB0A59599}"/>
               </a:ext>
             </a:extLst>
           </p:cNvPr>
@@ -4006,7 +4006,7 @@
           <p:cNvPr id="3" name="テキスト ボックス 2">
             <a:extLst>
               <a:ext uri="{FF2B5EF4-FFF2-40B4-BE49-F238E27FC236}">
-                <a16:creationId xmlns:a16="http://schemas.microsoft.com/office/drawing/2014/main" id="{8AAC80C8-EDB7-BB51-3EB5-177895ABF467}"/>
+                <a16:creationId xmlns:a16="http://schemas.microsoft.com/office/drawing/2014/main" id="{A4E79165-9EA0-803F-8FAA-A66A295F968D}"/>
               </a:ext>
             </a:extLst>
           </p:cNvPr>
@@ -4046,7 +4046,7 @@
           <p:cNvPr id="4" name="テキスト ボックス 3">
             <a:extLst>
               <a:ext uri="{FF2B5EF4-FFF2-40B4-BE49-F238E27FC236}">
-                <a16:creationId xmlns:a16="http://schemas.microsoft.com/office/drawing/2014/main" id="{F23A93E5-CD3F-7101-B146-5147D0870AF7}"/>
+                <a16:creationId xmlns:a16="http://schemas.microsoft.com/office/drawing/2014/main" id="{6EB81295-BA89-9A9E-7D6C-D9A667840009}"/>
               </a:ext>
             </a:extLst>
           </p:cNvPr>
@@ -4095,7 +4095,7 @@
           <p:cNvPr id="5" name="テキスト ボックス 4">
             <a:extLst>
               <a:ext uri="{FF2B5EF4-FFF2-40B4-BE49-F238E27FC236}">
-                <a16:creationId xmlns:a16="http://schemas.microsoft.com/office/drawing/2014/main" id="{40CA02C6-C076-B16D-5EB6-6C6656F3D239}"/>
+                <a16:creationId xmlns:a16="http://schemas.microsoft.com/office/drawing/2014/main" id="{48A5DA93-DC96-D525-3171-9D20BAE99286}"/>
               </a:ext>
             </a:extLst>
           </p:cNvPr>
@@ -4142,7 +4142,7 @@
             <a:hlinkClick r:id="" action="ppaction://media"/>
             <a:extLst>
               <a:ext uri="{FF2B5EF4-FFF2-40B4-BE49-F238E27FC236}">
-                <a16:creationId xmlns:a16="http://schemas.microsoft.com/office/drawing/2014/main" id="{3C0AED45-3DEC-652E-160C-47D2D18BD238}"/>
+                <a16:creationId xmlns:a16="http://schemas.microsoft.com/office/drawing/2014/main" id="{8F42680B-381D-FAAF-8F67-15B3390C60D6}"/>
               </a:ext>
             </a:extLst>
           </p:cNvPr>
@@ -4177,7 +4177,7 @@
     </p:spTree>
     <p:extLst>
       <p:ext uri="{BB962C8B-B14F-4D97-AF65-F5344CB8AC3E}">
-        <p14:creationId xmlns:p14="http://schemas.microsoft.com/office/powerpoint/2010/main" val="1603063155"/>
+        <p14:creationId xmlns:p14="http://schemas.microsoft.com/office/powerpoint/2010/main" val="543995185"/>
       </p:ext>
     </p:extLst>
   </p:cSld>
@@ -4301,7 +4301,7 @@
           <p:cNvPr id="2" name="テキスト ボックス 1">
             <a:extLst>
               <a:ext uri="{FF2B5EF4-FFF2-40B4-BE49-F238E27FC236}">
-                <a16:creationId xmlns:a16="http://schemas.microsoft.com/office/drawing/2014/main" id="{F4AD22F9-95BF-4739-CA5E-8F76D6C3D5AD}"/>
+                <a16:creationId xmlns:a16="http://schemas.microsoft.com/office/drawing/2014/main" id="{4A37E77C-085A-BD5C-649C-AB6C4B01D1EE}"/>
               </a:ext>
             </a:extLst>
           </p:cNvPr>
@@ -4347,7 +4347,7 @@
           <p:cNvPr id="3" name="テキスト ボックス 2">
             <a:extLst>
               <a:ext uri="{FF2B5EF4-FFF2-40B4-BE49-F238E27FC236}">
-                <a16:creationId xmlns:a16="http://schemas.microsoft.com/office/drawing/2014/main" id="{946340C6-4932-C3B1-48B3-8A7163E21AF7}"/>
+                <a16:creationId xmlns:a16="http://schemas.microsoft.com/office/drawing/2014/main" id="{FDF07822-878C-E608-76C4-AC8EF361FF90}"/>
               </a:ext>
             </a:extLst>
           </p:cNvPr>
@@ -4387,7 +4387,7 @@
           <p:cNvPr id="4" name="テキスト ボックス 3">
             <a:extLst>
               <a:ext uri="{FF2B5EF4-FFF2-40B4-BE49-F238E27FC236}">
-                <a16:creationId xmlns:a16="http://schemas.microsoft.com/office/drawing/2014/main" id="{B4BA4399-6C0A-3036-93AA-B9F8C9CDD4C7}"/>
+                <a16:creationId xmlns:a16="http://schemas.microsoft.com/office/drawing/2014/main" id="{4D200B2B-6C40-FDDF-2820-0B0BF533F81F}"/>
               </a:ext>
             </a:extLst>
           </p:cNvPr>
@@ -4482,7 +4482,7 @@
           <p:cNvPr id="5" name="テキスト ボックス 4">
             <a:extLst>
               <a:ext uri="{FF2B5EF4-FFF2-40B4-BE49-F238E27FC236}">
-                <a16:creationId xmlns:a16="http://schemas.microsoft.com/office/drawing/2014/main" id="{D0EF2949-D418-FECC-B33A-21ECEC28017A}"/>
+                <a16:creationId xmlns:a16="http://schemas.microsoft.com/office/drawing/2014/main" id="{8AA598F8-DA30-C62A-A89F-03219A1B726D}"/>
               </a:ext>
             </a:extLst>
           </p:cNvPr>
@@ -4529,7 +4529,7 @@
             <a:hlinkClick r:id="" action="ppaction://media"/>
             <a:extLst>
               <a:ext uri="{FF2B5EF4-FFF2-40B4-BE49-F238E27FC236}">
-                <a16:creationId xmlns:a16="http://schemas.microsoft.com/office/drawing/2014/main" id="{58706EDC-F1AC-5225-2059-09967968ACFF}"/>
+                <a16:creationId xmlns:a16="http://schemas.microsoft.com/office/drawing/2014/main" id="{AC784CC4-8334-61D3-8726-FB7EA524F893}"/>
               </a:ext>
             </a:extLst>
           </p:cNvPr>
@@ -4564,7 +4564,7 @@
     </p:spTree>
     <p:extLst>
       <p:ext uri="{BB962C8B-B14F-4D97-AF65-F5344CB8AC3E}">
-        <p14:creationId xmlns:p14="http://schemas.microsoft.com/office/powerpoint/2010/main" val="95890105"/>
+        <p14:creationId xmlns:p14="http://schemas.microsoft.com/office/powerpoint/2010/main" val="1907061315"/>
       </p:ext>
     </p:extLst>
   </p:cSld>
@@ -4688,7 +4688,7 @@
           <p:cNvPr id="2" name="テキスト ボックス 1">
             <a:extLst>
               <a:ext uri="{FF2B5EF4-FFF2-40B4-BE49-F238E27FC236}">
-                <a16:creationId xmlns:a16="http://schemas.microsoft.com/office/drawing/2014/main" id="{BED7FEC2-C07E-2E5F-C0A2-5DC4C5B63047}"/>
+                <a16:creationId xmlns:a16="http://schemas.microsoft.com/office/drawing/2014/main" id="{A109ED98-FE7D-18A1-4A39-C4DE7D0A161D}"/>
               </a:ext>
             </a:extLst>
           </p:cNvPr>
@@ -4734,7 +4734,7 @@
           <p:cNvPr id="3" name="テキスト ボックス 2">
             <a:extLst>
               <a:ext uri="{FF2B5EF4-FFF2-40B4-BE49-F238E27FC236}">
-                <a16:creationId xmlns:a16="http://schemas.microsoft.com/office/drawing/2014/main" id="{78228CC4-ECB1-9356-9418-D9DFE6DCA693}"/>
+                <a16:creationId xmlns:a16="http://schemas.microsoft.com/office/drawing/2014/main" id="{02DCF581-72D2-24ED-780E-3969DD9DD102}"/>
               </a:ext>
             </a:extLst>
           </p:cNvPr>
@@ -4774,7 +4774,7 @@
           <p:cNvPr id="4" name="テキスト ボックス 3">
             <a:extLst>
               <a:ext uri="{FF2B5EF4-FFF2-40B4-BE49-F238E27FC236}">
-                <a16:creationId xmlns:a16="http://schemas.microsoft.com/office/drawing/2014/main" id="{0AA09B7D-4243-B24F-2B3B-9A4A71C7FA76}"/>
+                <a16:creationId xmlns:a16="http://schemas.microsoft.com/office/drawing/2014/main" id="{E81EEB0F-B442-F386-7A60-BB3F24676B4A}"/>
               </a:ext>
             </a:extLst>
           </p:cNvPr>
@@ -4884,7 +4884,7 @@
           <p:cNvPr id="5" name="テキスト ボックス 4">
             <a:extLst>
               <a:ext uri="{FF2B5EF4-FFF2-40B4-BE49-F238E27FC236}">
-                <a16:creationId xmlns:a16="http://schemas.microsoft.com/office/drawing/2014/main" id="{2FC2BB75-1D9C-C285-4824-0F5FEEF80417}"/>
+                <a16:creationId xmlns:a16="http://schemas.microsoft.com/office/drawing/2014/main" id="{E96BF1BB-A162-E3E3-3CEE-9940AA072E37}"/>
               </a:ext>
             </a:extLst>
           </p:cNvPr>
@@ -4931,7 +4931,7 @@
             <a:hlinkClick r:id="" action="ppaction://media"/>
             <a:extLst>
               <a:ext uri="{FF2B5EF4-FFF2-40B4-BE49-F238E27FC236}">
-                <a16:creationId xmlns:a16="http://schemas.microsoft.com/office/drawing/2014/main" id="{72FDA5AB-0CB1-0D0D-C02D-F473A3CD65E9}"/>
+                <a16:creationId xmlns:a16="http://schemas.microsoft.com/office/drawing/2014/main" id="{29C0C6FF-4109-7729-AD6B-40118863D000}"/>
               </a:ext>
             </a:extLst>
           </p:cNvPr>
@@ -4966,7 +4966,7 @@
     </p:spTree>
     <p:extLst>
       <p:ext uri="{BB962C8B-B14F-4D97-AF65-F5344CB8AC3E}">
-        <p14:creationId xmlns:p14="http://schemas.microsoft.com/office/powerpoint/2010/main" val="3615633825"/>
+        <p14:creationId xmlns:p14="http://schemas.microsoft.com/office/powerpoint/2010/main" val="3653656589"/>
       </p:ext>
     </p:extLst>
   </p:cSld>
@@ -5090,7 +5090,7 @@
           <p:cNvPr id="2" name="テキスト ボックス 1">
             <a:extLst>
               <a:ext uri="{FF2B5EF4-FFF2-40B4-BE49-F238E27FC236}">
-                <a16:creationId xmlns:a16="http://schemas.microsoft.com/office/drawing/2014/main" id="{EF604F8A-6C9F-0CBF-E7A8-F26629C341ED}"/>
+                <a16:creationId xmlns:a16="http://schemas.microsoft.com/office/drawing/2014/main" id="{C934A682-755A-B28A-A67A-B6CA767AFE3B}"/>
               </a:ext>
             </a:extLst>
           </p:cNvPr>
@@ -5136,7 +5136,7 @@
           <p:cNvPr id="3" name="テキスト ボックス 2">
             <a:extLst>
               <a:ext uri="{FF2B5EF4-FFF2-40B4-BE49-F238E27FC236}">
-                <a16:creationId xmlns:a16="http://schemas.microsoft.com/office/drawing/2014/main" id="{54BC7DB0-5D8A-49C8-23CF-7E9C59A70319}"/>
+                <a16:creationId xmlns:a16="http://schemas.microsoft.com/office/drawing/2014/main" id="{1456C8E0-7C57-987C-77D5-CF007A432B19}"/>
               </a:ext>
             </a:extLst>
           </p:cNvPr>
@@ -5176,7 +5176,7 @@
           <p:cNvPr id="4" name="テキスト ボックス 3">
             <a:extLst>
               <a:ext uri="{FF2B5EF4-FFF2-40B4-BE49-F238E27FC236}">
-                <a16:creationId xmlns:a16="http://schemas.microsoft.com/office/drawing/2014/main" id="{523DACAD-17C2-8BAB-5804-FB57DCA0BD99}"/>
+                <a16:creationId xmlns:a16="http://schemas.microsoft.com/office/drawing/2014/main" id="{EE43753F-64C7-995D-35D5-5E0D302FB544}"/>
               </a:ext>
             </a:extLst>
           </p:cNvPr>
@@ -5200,20 +5200,14 @@
           <a:lstStyle/>
           <a:p>
             <a:r>
-              <a:rPr kumimoji="1" lang="en-US" altLang="ja-JP" sz="2000">
+              <a:rPr kumimoji="1" lang="ja-JP" altLang="en-US" sz="2000">
                 <a:solidFill>
                   <a:srgbClr val="333333"/>
                 </a:solidFill>
                 <a:latin typeface="Arial" panose="020B0604020202020204" pitchFamily="34" charset="0"/>
               </a:rPr>
-              <a:t>Add SEO UGC and monetization strategy</a:t>
-            </a:r>
-            <a:endParaRPr kumimoji="1" lang="ja-JP" altLang="en-US" sz="2000">
-              <a:solidFill>
-                <a:srgbClr val="333333"/>
-              </a:solidFill>
-              <a:latin typeface="Arial" panose="020B0604020202020204" pitchFamily="34" charset="0"/>
-            </a:endParaRPr>
+              <a:t>直近のコミットでは、新機能の追加と実装強化が行われました。</a:t>
+            </a:r>
           </a:p>
         </p:txBody>
       </p:sp>
@@ -5222,7 +5216,7 @@
           <p:cNvPr id="5" name="テキスト ボックス 4">
             <a:extLst>
               <a:ext uri="{FF2B5EF4-FFF2-40B4-BE49-F238E27FC236}">
-                <a16:creationId xmlns:a16="http://schemas.microsoft.com/office/drawing/2014/main" id="{05179956-E4E1-19E7-E980-D42E28F47787}"/>
+                <a16:creationId xmlns:a16="http://schemas.microsoft.com/office/drawing/2014/main" id="{CF5C3F0F-E1F0-0B4C-6EEF-99AC53F4C22D}"/>
               </a:ext>
             </a:extLst>
           </p:cNvPr>
@@ -5269,7 +5263,7 @@
             <a:hlinkClick r:id="" action="ppaction://media"/>
             <a:extLst>
               <a:ext uri="{FF2B5EF4-FFF2-40B4-BE49-F238E27FC236}">
-                <a16:creationId xmlns:a16="http://schemas.microsoft.com/office/drawing/2014/main" id="{3F5DCA99-D2FE-117A-1EA8-79A2D36AE483}"/>
+                <a16:creationId xmlns:a16="http://schemas.microsoft.com/office/drawing/2014/main" id="{76299659-A923-A722-6ED5-0E53EBD02435}"/>
               </a:ext>
             </a:extLst>
           </p:cNvPr>
@@ -5304,7 +5298,7 @@
     </p:spTree>
     <p:extLst>
       <p:ext uri="{BB962C8B-B14F-4D97-AF65-F5344CB8AC3E}">
-        <p14:creationId xmlns:p14="http://schemas.microsoft.com/office/powerpoint/2010/main" val="13486967"/>
+        <p14:creationId xmlns:p14="http://schemas.microsoft.com/office/powerpoint/2010/main" val="2639882390"/>
       </p:ext>
     </p:extLst>
   </p:cSld>
@@ -5313,10 +5307,10 @@
   </p:clrMapOvr>
   <mc:AlternateContent xmlns:mc="http://schemas.openxmlformats.org/markup-compatibility/2006">
     <mc:Choice xmlns:p14="http://schemas.microsoft.com/office/powerpoint/2010/main" Requires="p14">
-      <p:transition spd="slow" p14:dur="2000" advTm="9000"/>
+      <p:transition spd="slow" p14:dur="2000" advTm="6000"/>
     </mc:Choice>
     <mc:Fallback>
-      <p:transition spd="slow" advTm="9000"/>
+      <p:transition spd="slow" advTm="6000"/>
     </mc:Fallback>
   </mc:AlternateContent>
   <p:timing>
@@ -5347,7 +5341,7 @@
                                   <p:childTnLst>
                                     <p:cmd type="call" cmd="playFrom(0.0)">
                                       <p:cBhvr>
-                                        <p:cTn id="6" dur="8026" fill="hold"/>
+                                        <p:cTn id="6" dur="5687" fill="hold"/>
                                         <p:tgtEl>
                                           <p:spTgt spid="6"/>
                                         </p:tgtEl>
@@ -5428,7 +5422,7 @@
           <p:cNvPr id="2" name="テキスト ボックス 1">
             <a:extLst>
               <a:ext uri="{FF2B5EF4-FFF2-40B4-BE49-F238E27FC236}">
-                <a16:creationId xmlns:a16="http://schemas.microsoft.com/office/drawing/2014/main" id="{FC4C02CB-1A2C-7689-9C75-C9D1C6DE705D}"/>
+                <a16:creationId xmlns:a16="http://schemas.microsoft.com/office/drawing/2014/main" id="{1F844B4A-5AAE-FA71-DE77-39AC64FA0E15}"/>
               </a:ext>
             </a:extLst>
           </p:cNvPr>
@@ -5474,7 +5468,7 @@
           <p:cNvPr id="3" name="テキスト ボックス 2">
             <a:extLst>
               <a:ext uri="{FF2B5EF4-FFF2-40B4-BE49-F238E27FC236}">
-                <a16:creationId xmlns:a16="http://schemas.microsoft.com/office/drawing/2014/main" id="{0DBC663A-6398-94FD-5945-96F34463F777}"/>
+                <a16:creationId xmlns:a16="http://schemas.microsoft.com/office/drawing/2014/main" id="{435D6049-8CD7-DAE1-1452-D4361FB5B764}"/>
               </a:ext>
             </a:extLst>
           </p:cNvPr>
@@ -5514,7 +5508,7 @@
           <p:cNvPr id="4" name="テキスト ボックス 3">
             <a:extLst>
               <a:ext uri="{FF2B5EF4-FFF2-40B4-BE49-F238E27FC236}">
-                <a16:creationId xmlns:a16="http://schemas.microsoft.com/office/drawing/2014/main" id="{10042722-8864-6EE4-0CD8-B59D068BA8D1}"/>
+                <a16:creationId xmlns:a16="http://schemas.microsoft.com/office/drawing/2014/main" id="{94C8FCD1-7C7B-6639-1A24-9F184A065532}"/>
               </a:ext>
             </a:extLst>
           </p:cNvPr>
@@ -5579,7 +5573,7 @@
           <p:cNvPr id="5" name="テキスト ボックス 4">
             <a:extLst>
               <a:ext uri="{FF2B5EF4-FFF2-40B4-BE49-F238E27FC236}">
-                <a16:creationId xmlns:a16="http://schemas.microsoft.com/office/drawing/2014/main" id="{DD75A19B-0F62-D9E4-885B-681C54E0DD8C}"/>
+                <a16:creationId xmlns:a16="http://schemas.microsoft.com/office/drawing/2014/main" id="{4E765743-8367-E8F0-DE3D-229740421B82}"/>
               </a:ext>
             </a:extLst>
           </p:cNvPr>
@@ -5626,7 +5620,7 @@
             <a:hlinkClick r:id="" action="ppaction://media"/>
             <a:extLst>
               <a:ext uri="{FF2B5EF4-FFF2-40B4-BE49-F238E27FC236}">
-                <a16:creationId xmlns:a16="http://schemas.microsoft.com/office/drawing/2014/main" id="{EC643300-E440-F872-83F8-E520A9CF412D}"/>
+                <a16:creationId xmlns:a16="http://schemas.microsoft.com/office/drawing/2014/main" id="{18B62521-AA48-0796-E9A9-BB7F35B94E76}"/>
               </a:ext>
             </a:extLst>
           </p:cNvPr>
@@ -5661,7 +5655,7 @@
     </p:spTree>
     <p:extLst>
       <p:ext uri="{BB962C8B-B14F-4D97-AF65-F5344CB8AC3E}">
-        <p14:creationId xmlns:p14="http://schemas.microsoft.com/office/powerpoint/2010/main" val="3360426382"/>
+        <p14:creationId xmlns:p14="http://schemas.microsoft.com/office/powerpoint/2010/main" val="3724499614"/>
       </p:ext>
     </p:extLst>
   </p:cSld>
